--- a/담임/2-7반_학급OT_2026.pptx
+++ b/담임/2-7반_학급OT_2026.pptx
@@ -12512,7 +12512,7 @@
         </p:nvSpPr>
         <p:spPr>
           <a:xfrm>
-            <a:off x="7300570" y="2542032"/>
+            <a:off x="7300569" y="3017520"/>
             <a:ext cx="1660550" cy="475488"/>
           </a:xfrm>
           <a:prstGeom prst="rect">
@@ -12544,7 +12544,7 @@
         </p:nvSpPr>
         <p:spPr>
           <a:xfrm>
-            <a:off x="7346290" y="2613355"/>
+            <a:off x="7346290" y="3047049"/>
             <a:ext cx="1578254" cy="342351"/>
           </a:xfrm>
           <a:prstGeom prst="rect">
@@ -12888,38 +12888,6 @@
               <a:t>대수 2-8</a:t>
             </a:r>
             <a:endParaRPr lang="en-US" sz="1200" dirty="0"/>
-          </a:p>
-        </p:txBody>
-      </p:sp>
-      <p:sp>
-        <p:nvSpPr>
-          <p:cNvPr id="69" name="Shape 67"/>
-          <p:cNvSpPr/>
-          <p:nvPr/>
-        </p:nvSpPr>
-        <p:spPr>
-          <a:xfrm>
-            <a:off x="7300570" y="3017520"/>
-            <a:ext cx="1660550" cy="475488"/>
-          </a:xfrm>
-          <a:prstGeom prst="rect">
-            <a:avLst/>
-          </a:prstGeom>
-          <a:solidFill>
-            <a:srgbClr val="EEF3FA"/>
-          </a:solidFill>
-          <a:ln w="9525">
-            <a:solidFill>
-              <a:srgbClr val="E2E8F0"/>
-            </a:solidFill>
-            <a:prstDash val="solid"/>
-          </a:ln>
-        </p:spPr>
-        <p:txBody>
-          <a:bodyPr/>
-          <a:lstStyle/>
-          <a:p>
-            <a:endParaRPr lang="ko-KR" altLang="en-US"/>
           </a:p>
         </p:txBody>
       </p:sp>
